--- a/course_materials/weeks/week_04/week_04_views_identity_safe_change.pptx
+++ b/course_materials/weeks/week_04/week_04_views_identity_safe_change.pptx
@@ -7348,661 +7348,661 @@
 </file>
 
 <file path=ppt/slides/slide16.xml><?xml version="1.0" encoding="utf-8"?>
-<p:sld xmlns:p="http://schemas.openxmlformats.org/presentationml/2006/main">
-  <p:cSld>
-    <p:bg>
-      <p:bgPr>
-        <a:solidFill xmlns:a="http://schemas.openxmlformats.org/drawingml/2006/main">
-          <a:srgbClr val="F7F3EA"/>
-        </a:solidFill>
-      </p:bgPr>
-    </p:bg>
-    <p:spTree>
-      <p:nvGrpSpPr>
-        <p:cNvPr id="1" name=""/>
-        <p:cNvGrpSpPr/>
-        <p:nvPr/>
-      </p:nvGrpSpPr>
-      <p:grpSpPr>
-        <a:xfrm xmlns:a="http://schemas.openxmlformats.org/drawingml/2006/main"/>
-      </p:grpSpPr>
-      <p:sp>
-        <p:nvSpPr>
-          <p:cNvPr id="12" name="">
-            <a:extLst xmlns:a="http://schemas.openxmlformats.org/drawingml/2006/main">
-              <a:ext uri="{FF2B5EF4-FFF2-40B4-BE49-F238E27FC236}">
-                <a16:creationId xmlns:a16="http://schemas.microsoft.com/office/drawing/2014/main" id="{B04030B4-4F6D-4F40-B102-EEE7223B3A1F}"/>
-              </a:ext>
-            </a:extLst>
-          </p:cNvPr>
-          <p:cNvSpPr>
-            <a:spLocks xmlns:a="http://schemas.openxmlformats.org/drawingml/2006/main" noGrp="1"/>
-          </p:cNvSpPr>
-          <p:nvPr/>
-        </p:nvSpPr>
-        <p:spPr>
-          <a:xfrm xmlns:a="http://schemas.openxmlformats.org/drawingml/2006/main">
-            <a:off x="552450" y="400050"/>
-            <a:ext cx="1483995" cy="323850"/>
-          </a:xfrm>
-          <a:prstGeom xmlns:a="http://schemas.openxmlformats.org/drawingml/2006/main" prst="roundRect">
-            <a:avLst>
-              <a:gd name="adj" fmla="val 50000"/>
-            </a:avLst>
-          </a:prstGeom>
-          <a:solidFill xmlns:a="http://schemas.openxmlformats.org/drawingml/2006/main">
-            <a:srgbClr val="14213D"/>
-          </a:solidFill>
-          <a:ln xmlns:a="http://schemas.openxmlformats.org/drawingml/2006/main" w="9525">
-            <a:solidFill>
-              <a:srgbClr val="14213D"/>
-            </a:solidFill>
-            <a:prstDash val="solid"/>
-          </a:ln>
-        </p:spPr>
-        <p:txBody>
-          <a:bodyPr xmlns:a="http://schemas.openxmlformats.org/drawingml/2006/main" lIns="66675" tIns="0" rIns="66675" bIns="0" anchor="ctr">
-            <a:normAutofit fontScale="82275"/>
-          </a:bodyPr>
-          <a:lstStyle xmlns:a="http://schemas.openxmlformats.org/drawingml/2006/main"/>
-          <a:p xmlns:a="http://schemas.openxmlformats.org/drawingml/2006/main">
-            <a:pPr algn="ctr">
-              <a:buNone/>
-              <a:defRPr sz="1050" b="1">
-                <a:solidFill>
-                  <a:srgbClr val="FFFFFF"/>
-                </a:solidFill>
-                <a:latin typeface="Avenir Next"/>
-                <a:ea typeface="Avenir Next"/>
-                <a:cs typeface="Avenir Next"/>
-              </a:defRPr>
-            </a:pPr>
-            <a:r>
-              <a:rPr sz="1050" b="1">
-                <a:solidFill>
-                  <a:srgbClr val="FFFFFF"/>
-                </a:solidFill>
-                <a:latin typeface="Avenir Next"/>
-                <a:ea typeface="Avenir Next"/>
-                <a:cs typeface="Avenir Next"/>
-              </a:rPr>
-              <a:t>SUPABASE SQL EDITOR</a:t>
-            </a:r>
-          </a:p>
-        </p:txBody>
-      </p:sp>
-      <p:sp>
-        <p:nvSpPr>
-          <p:cNvPr id="2" name="">
-            <a:extLst xmlns:a="http://schemas.openxmlformats.org/drawingml/2006/main">
-              <a:ext uri="{FF2B5EF4-FFF2-40B4-BE49-F238E27FC236}">
-                <a16:creationId xmlns:a16="http://schemas.microsoft.com/office/drawing/2014/main" id="{4A8AD773-5FC9-423E-9EF2-2FD0246BD91D}"/>
-              </a:ext>
-            </a:extLst>
-          </p:cNvPr>
-          <p:cNvSpPr>
-            <a:spLocks xmlns:a="http://schemas.openxmlformats.org/drawingml/2006/main" noGrp="1"/>
-          </p:cNvSpPr>
-          <p:nvPr/>
-        </p:nvSpPr>
-        <p:spPr>
-          <a:xfrm xmlns:a="http://schemas.openxmlformats.org/drawingml/2006/main">
-            <a:off x="552450" y="914400"/>
-            <a:ext cx="11049000" cy="704850"/>
-          </a:xfrm>
-          <a:prstGeom xmlns:a="http://schemas.openxmlformats.org/drawingml/2006/main" prst="rect">
-            <a:avLst/>
-          </a:prstGeom>
-          <a:noFill xmlns:a="http://schemas.openxmlformats.org/drawingml/2006/main"/>
-          <a:ln xmlns:a="http://schemas.openxmlformats.org/drawingml/2006/main" w="0">
-            <a:noFill/>
-            <a:prstDash val="solid"/>
-          </a:ln>
-        </p:spPr>
-        <p:txBody>
-          <a:bodyPr xmlns:a="http://schemas.openxmlformats.org/drawingml/2006/main" wrap="square" lIns="0" tIns="0" rIns="0" bIns="0" anchor="t">
-            <a:noAutofit/>
-          </a:bodyPr>
-          <a:lstStyle xmlns:a="http://schemas.openxmlformats.org/drawingml/2006/main"/>
-          <a:p xmlns:a="http://schemas.openxmlformats.org/drawingml/2006/main">
-            <a:pPr algn="l">
-              <a:lnSpc>
-                <a:spcPct val="95000"/>
-              </a:lnSpc>
-              <a:buNone/>
-              <a:defRPr sz="2700" b="1">
-                <a:solidFill>
-                  <a:srgbClr val="14213D"/>
-                </a:solidFill>
-                <a:latin typeface="Georgia"/>
-                <a:ea typeface="Georgia"/>
-                <a:cs typeface="Georgia"/>
-              </a:defRPr>
-            </a:pPr>
-            <a:r>
-              <a:rPr sz="2700" b="1">
-                <a:solidFill>
-                  <a:srgbClr val="14213D"/>
-                </a:solidFill>
-                <a:latin typeface="Georgia"/>
-                <a:ea typeface="Georgia"/>
-                <a:cs typeface="Georgia"/>
-              </a:rPr>
-              <a:t>A temporary-table rollback in Supabase</a:t>
-            </a:r>
-          </a:p>
-        </p:txBody>
-      </p:sp>
-      <p:sp>
-        <p:nvSpPr>
-          <p:cNvPr id="3" name="">
-            <a:extLst xmlns:a="http://schemas.openxmlformats.org/drawingml/2006/main">
-              <a:ext uri="{FF2B5EF4-FFF2-40B4-BE49-F238E27FC236}">
-                <a16:creationId xmlns:a16="http://schemas.microsoft.com/office/drawing/2014/main" id="{9DA3C4D8-DF6B-4DB6-A58E-F8296637B7B7}"/>
-              </a:ext>
-            </a:extLst>
-          </p:cNvPr>
-          <p:cNvSpPr>
-            <a:spLocks xmlns:a="http://schemas.openxmlformats.org/drawingml/2006/main" noGrp="1"/>
-          </p:cNvSpPr>
-          <p:nvPr/>
-        </p:nvSpPr>
-        <p:spPr>
-          <a:xfrm xmlns:a="http://schemas.openxmlformats.org/drawingml/2006/main">
-            <a:off x="10477500" y="6334125"/>
-            <a:ext cx="1143000" cy="228600"/>
-          </a:xfrm>
-          <a:prstGeom xmlns:a="http://schemas.openxmlformats.org/drawingml/2006/main" prst="rect">
-            <a:avLst/>
-          </a:prstGeom>
-          <a:noFill xmlns:a="http://schemas.openxmlformats.org/drawingml/2006/main"/>
-          <a:ln xmlns:a="http://schemas.openxmlformats.org/drawingml/2006/main" w="0">
-            <a:noFill/>
-            <a:prstDash val="solid"/>
-          </a:ln>
-        </p:spPr>
-        <p:txBody>
-          <a:bodyPr xmlns:a="http://schemas.openxmlformats.org/drawingml/2006/main" lIns="0" tIns="0" rIns="0" bIns="0" anchor="t">
-            <a:noAutofit/>
-          </a:bodyPr>
-          <a:lstStyle xmlns:a="http://schemas.openxmlformats.org/drawingml/2006/main"/>
-          <a:p xmlns:a="http://schemas.openxmlformats.org/drawingml/2006/main">
-            <a:pPr algn="r">
-              <a:buNone/>
-              <a:defRPr sz="900" b="1">
-                <a:solidFill>
-                  <a:srgbClr val="64748B"/>
-                </a:solidFill>
-                <a:latin typeface="Helvetica Neue"/>
-                <a:ea typeface="Helvetica Neue"/>
-                <a:cs typeface="Helvetica Neue"/>
-              </a:defRPr>
-            </a:pPr>
-            <a:r>
-              <a:rPr sz="900" b="1">
-                <a:solidFill>
-                  <a:srgbClr val="64748B"/>
-                </a:solidFill>
-                <a:latin typeface="Helvetica Neue"/>
-                <a:ea typeface="Helvetica Neue"/>
-                <a:cs typeface="Helvetica Neue"/>
-              </a:rPr>
-              <a:t>16</a:t>
-            </a:r>
-          </a:p>
-        </p:txBody>
-      </p:sp>
-      <p:sp>
-        <p:nvSpPr>
-          <p:cNvPr id="4" name="">
-            <a:extLst xmlns:a="http://schemas.openxmlformats.org/drawingml/2006/main">
-              <a:ext uri="{FF2B5EF4-FFF2-40B4-BE49-F238E27FC236}">
-                <a16:creationId xmlns:a16="http://schemas.microsoft.com/office/drawing/2014/main" id="{F6968143-DC77-42D4-B8C2-CEE24C0CAEB0}"/>
-              </a:ext>
-            </a:extLst>
-          </p:cNvPr>
-          <p:cNvSpPr>
-            <a:spLocks xmlns:a="http://schemas.openxmlformats.org/drawingml/2006/main" noGrp="1"/>
-          </p:cNvSpPr>
-          <p:nvPr/>
-        </p:nvSpPr>
-        <p:spPr>
-          <a:xfrm xmlns:a="http://schemas.openxmlformats.org/drawingml/2006/main">
-            <a:off x="552450" y="1952625"/>
-            <a:ext cx="6762750" cy="4095750"/>
-          </a:xfrm>
-          <a:prstGeom xmlns:a="http://schemas.openxmlformats.org/drawingml/2006/main" prst="roundRect">
-            <a:avLst>
-              <a:gd name="adj" fmla="val 4186"/>
-            </a:avLst>
-          </a:prstGeom>
-          <a:solidFill xmlns:a="http://schemas.openxmlformats.org/drawingml/2006/main">
-            <a:srgbClr val="FFFFFF"/>
-          </a:solidFill>
-          <a:ln xmlns:a="http://schemas.openxmlformats.org/drawingml/2006/main" w="9525">
-            <a:solidFill>
-              <a:srgbClr val="E9E4D8"/>
-            </a:solidFill>
-            <a:prstDash val="solid"/>
-          </a:ln>
-        </p:spPr>
-      </p:sp>
-      <p:pic>
-        <p:nvPicPr>
-          <p:cNvPr id="18" name=""/>
-          <p:cNvPicPr>
-            <a:picLocks xmlns:a="http://schemas.openxmlformats.org/drawingml/2006/main" noChangeAspect="1"/>
-          </p:cNvPicPr>
-          <p:nvPr/>
-        </p:nvPicPr>
-        <p:blipFill>
-          <a:blip xmlns:r="http://schemas.openxmlformats.org/officeDocument/2006/relationships" xmlns:a="http://schemas.openxmlformats.org/drawingml/2006/main" r:embed="R3840561e764046ad"/>
-          <a:srcRect xmlns:a="http://schemas.openxmlformats.org/drawingml/2006/main" l="0" t="25449" r="0" b="25449"/>
-          <a:stretch xmlns:a="http://schemas.openxmlformats.org/drawingml/2006/main">
-            <a:fillRect l="0" t="0" r="0" b="0"/>
-          </a:stretch>
-        </p:blipFill>
-        <p:spPr>
-          <a:xfrm xmlns:a="http://schemas.openxmlformats.org/drawingml/2006/main">
-            <a:off x="695325" y="2095500"/>
-            <a:ext cx="6477000" cy="3810000"/>
-          </a:xfrm>
-          <a:prstGeom xmlns:a="http://schemas.openxmlformats.org/drawingml/2006/main" prst="roundRect">
-            <a:avLst>
-              <a:gd name="adj" fmla="val 3000"/>
-            </a:avLst>
-          </a:prstGeom>
-        </p:spPr>
-      </p:pic>
-      <p:sp>
-        <p:nvSpPr>
-          <p:cNvPr id="6" name="">
-            <a:extLst xmlns:a="http://schemas.openxmlformats.org/drawingml/2006/main">
-              <a:ext uri="{FF2B5EF4-FFF2-40B4-BE49-F238E27FC236}">
-                <a16:creationId xmlns:a16="http://schemas.microsoft.com/office/drawing/2014/main" id="{FD4C2BEE-EFD4-4D20-BB7B-5EC45413F748}"/>
-              </a:ext>
-            </a:extLst>
-          </p:cNvPr>
-          <p:cNvSpPr>
-            <a:spLocks xmlns:a="http://schemas.openxmlformats.org/drawingml/2006/main" noGrp="1"/>
-          </p:cNvSpPr>
-          <p:nvPr/>
-        </p:nvSpPr>
-        <p:spPr>
-          <a:xfrm xmlns:a="http://schemas.openxmlformats.org/drawingml/2006/main">
-            <a:off x="7810500" y="2124075"/>
-            <a:ext cx="400050" cy="323850"/>
-          </a:xfrm>
-          <a:prstGeom xmlns:a="http://schemas.openxmlformats.org/drawingml/2006/main" prst="roundRect">
-            <a:avLst>
-              <a:gd name="adj" fmla="val 50000"/>
-            </a:avLst>
-          </a:prstGeom>
-          <a:solidFill xmlns:a="http://schemas.openxmlformats.org/drawingml/2006/main">
-            <a:srgbClr val="F4A261"/>
-          </a:solidFill>
-          <a:ln xmlns:a="http://schemas.openxmlformats.org/drawingml/2006/main" w="9525">
-            <a:solidFill>
-              <a:srgbClr val="F4A261"/>
-            </a:solidFill>
-            <a:prstDash val="solid"/>
-          </a:ln>
-        </p:spPr>
-        <p:txBody>
-          <a:bodyPr xmlns:a="http://schemas.openxmlformats.org/drawingml/2006/main" lIns="66675" tIns="0" rIns="66675" bIns="0" anchor="ctr">
-            <a:normAutofit fontScale="100000"/>
-          </a:bodyPr>
-          <a:lstStyle xmlns:a="http://schemas.openxmlformats.org/drawingml/2006/main"/>
-          <a:p xmlns:a="http://schemas.openxmlformats.org/drawingml/2006/main">
-            <a:pPr algn="ctr">
-              <a:buNone/>
-              <a:defRPr sz="1050" b="1">
-                <a:solidFill>
-                  <a:srgbClr val="14213D"/>
-                </a:solidFill>
-                <a:latin typeface="Avenir Next"/>
-                <a:ea typeface="Avenir Next"/>
-                <a:cs typeface="Avenir Next"/>
-              </a:defRPr>
-            </a:pPr>
-            <a:r>
-              <a:rPr sz="1050" b="1">
-                <a:solidFill>
-                  <a:srgbClr val="14213D"/>
-                </a:solidFill>
-                <a:latin typeface="Avenir Next"/>
-                <a:ea typeface="Avenir Next"/>
-                <a:cs typeface="Avenir Next"/>
-              </a:rPr>
-              <a:t>1</a:t>
-            </a:r>
-          </a:p>
-        </p:txBody>
-      </p:sp>
-      <p:sp>
-        <p:nvSpPr>
-          <p:cNvPr id="7" name="">
-            <a:extLst xmlns:a="http://schemas.openxmlformats.org/drawingml/2006/main">
-              <a:ext uri="{FF2B5EF4-FFF2-40B4-BE49-F238E27FC236}">
-                <a16:creationId xmlns:a16="http://schemas.microsoft.com/office/drawing/2014/main" id="{7AFF07FE-3A57-4863-A085-5B214AB33FB7}"/>
-              </a:ext>
-            </a:extLst>
-          </p:cNvPr>
-          <p:cNvSpPr>
-            <a:spLocks xmlns:a="http://schemas.openxmlformats.org/drawingml/2006/main" noGrp="1"/>
-          </p:cNvSpPr>
-          <p:nvPr/>
-        </p:nvSpPr>
-        <p:spPr>
-          <a:xfrm xmlns:a="http://schemas.openxmlformats.org/drawingml/2006/main">
-            <a:off x="8420100" y="2143125"/>
-            <a:ext cx="3048000" cy="742950"/>
-          </a:xfrm>
-          <a:prstGeom xmlns:a="http://schemas.openxmlformats.org/drawingml/2006/main" prst="rect">
-            <a:avLst/>
-          </a:prstGeom>
-          <a:noFill xmlns:a="http://schemas.openxmlformats.org/drawingml/2006/main"/>
-          <a:ln xmlns:a="http://schemas.openxmlformats.org/drawingml/2006/main" w="0">
-            <a:noFill/>
-            <a:prstDash val="solid"/>
-          </a:ln>
-        </p:spPr>
-        <p:txBody>
-          <a:bodyPr xmlns:a="http://schemas.openxmlformats.org/drawingml/2006/main" wrap="square" lIns="0" tIns="0" rIns="0" bIns="0" anchor="t">
-            <a:noAutofit/>
-          </a:bodyPr>
-          <a:lstStyle xmlns:a="http://schemas.openxmlformats.org/drawingml/2006/main"/>
-          <a:p xmlns:a="http://schemas.openxmlformats.org/drawingml/2006/main">
-            <a:pPr algn="l">
-              <a:lnSpc>
-                <a:spcPct val="112000"/>
-              </a:lnSpc>
-              <a:buNone/>
-              <a:defRPr sz="1725" b="1">
-                <a:solidFill>
-                  <a:srgbClr val="14213D"/>
-                </a:solidFill>
-                <a:latin typeface="Avenir Next"/>
-                <a:ea typeface="Avenir Next"/>
-                <a:cs typeface="Avenir Next"/>
-              </a:defRPr>
-            </a:pPr>
-            <a:r>
-              <a:rPr sz="1725" b="1">
-                <a:solidFill>
-                  <a:srgbClr val="14213D"/>
-                </a:solidFill>
-                <a:latin typeface="Avenir Next"/>
-                <a:ea typeface="Avenir Next"/>
-                <a:cs typeface="Avenir Next"/>
-              </a:rPr>
-              <a:t>The saved screenshot shows a disposable temporary-table check.</a:t>
-            </a:r>
-          </a:p>
-        </p:txBody>
-      </p:sp>
-      <p:sp>
-        <p:nvSpPr>
-          <p:cNvPr id="8" name="">
-            <a:extLst xmlns:a="http://schemas.openxmlformats.org/drawingml/2006/main">
-              <a:ext uri="{FF2B5EF4-FFF2-40B4-BE49-F238E27FC236}">
-                <a16:creationId xmlns:a16="http://schemas.microsoft.com/office/drawing/2014/main" id="{6B8E6058-57B6-4010-8B30-D6AB0B6877E8}"/>
-              </a:ext>
-            </a:extLst>
-          </p:cNvPr>
-          <p:cNvSpPr>
-            <a:spLocks xmlns:a="http://schemas.openxmlformats.org/drawingml/2006/main" noGrp="1"/>
-          </p:cNvSpPr>
-          <p:nvPr/>
-        </p:nvSpPr>
-        <p:spPr>
-          <a:xfrm xmlns:a="http://schemas.openxmlformats.org/drawingml/2006/main">
-            <a:off x="7810500" y="3286125"/>
-            <a:ext cx="400050" cy="323850"/>
-          </a:xfrm>
-          <a:prstGeom xmlns:a="http://schemas.openxmlformats.org/drawingml/2006/main" prst="roundRect">
-            <a:avLst>
-              <a:gd name="adj" fmla="val 50000"/>
-            </a:avLst>
-          </a:prstGeom>
-          <a:solidFill xmlns:a="http://schemas.openxmlformats.org/drawingml/2006/main">
-            <a:srgbClr val="14213D"/>
-          </a:solidFill>
-          <a:ln xmlns:a="http://schemas.openxmlformats.org/drawingml/2006/main" w="9525">
-            <a:solidFill>
-              <a:srgbClr val="14213D"/>
-            </a:solidFill>
-            <a:prstDash val="solid"/>
-          </a:ln>
-        </p:spPr>
-        <p:txBody>
-          <a:bodyPr xmlns:a="http://schemas.openxmlformats.org/drawingml/2006/main" lIns="66675" tIns="0" rIns="66675" bIns="0" anchor="ctr">
-            <a:normAutofit fontScale="100000"/>
-          </a:bodyPr>
-          <a:lstStyle xmlns:a="http://schemas.openxmlformats.org/drawingml/2006/main"/>
-          <a:p xmlns:a="http://schemas.openxmlformats.org/drawingml/2006/main">
-            <a:pPr algn="ctr">
-              <a:buNone/>
-              <a:defRPr sz="1050" b="1">
-                <a:solidFill>
-                  <a:srgbClr val="FFFFFF"/>
-                </a:solidFill>
-                <a:latin typeface="Avenir Next"/>
-                <a:ea typeface="Avenir Next"/>
-                <a:cs typeface="Avenir Next"/>
-              </a:defRPr>
-            </a:pPr>
-            <a:r>
-              <a:rPr sz="1050" b="1">
-                <a:solidFill>
-                  <a:srgbClr val="FFFFFF"/>
-                </a:solidFill>
-                <a:latin typeface="Avenir Next"/>
-                <a:ea typeface="Avenir Next"/>
-                <a:cs typeface="Avenir Next"/>
-              </a:rPr>
-              <a:t>2</a:t>
-            </a:r>
-          </a:p>
-        </p:txBody>
-      </p:sp>
-      <p:sp>
-        <p:nvSpPr>
-          <p:cNvPr id="9" name="">
-            <a:extLst xmlns:a="http://schemas.openxmlformats.org/drawingml/2006/main">
-              <a:ext uri="{FF2B5EF4-FFF2-40B4-BE49-F238E27FC236}">
-                <a16:creationId xmlns:a16="http://schemas.microsoft.com/office/drawing/2014/main" id="{5917004D-BE3A-4D42-8A9D-F55079CFCB92}"/>
-              </a:ext>
-            </a:extLst>
-          </p:cNvPr>
-          <p:cNvSpPr>
-            <a:spLocks xmlns:a="http://schemas.openxmlformats.org/drawingml/2006/main" noGrp="1"/>
-          </p:cNvSpPr>
-          <p:nvPr/>
-        </p:nvSpPr>
-        <p:spPr>
-          <a:xfrm xmlns:a="http://schemas.openxmlformats.org/drawingml/2006/main">
-            <a:off x="8420100" y="3305175"/>
-            <a:ext cx="3048000" cy="742950"/>
-          </a:xfrm>
-          <a:prstGeom xmlns:a="http://schemas.openxmlformats.org/drawingml/2006/main" prst="rect">
-            <a:avLst/>
-          </a:prstGeom>
-          <a:noFill xmlns:a="http://schemas.openxmlformats.org/drawingml/2006/main"/>
-          <a:ln xmlns:a="http://schemas.openxmlformats.org/drawingml/2006/main" w="0">
-            <a:noFill/>
-            <a:prstDash val="solid"/>
-          </a:ln>
-        </p:spPr>
-        <p:txBody>
-          <a:bodyPr xmlns:a="http://schemas.openxmlformats.org/drawingml/2006/main" wrap="square" lIns="0" tIns="0" rIns="0" bIns="0" anchor="t">
-            <a:noAutofit/>
-          </a:bodyPr>
-          <a:lstStyle xmlns:a="http://schemas.openxmlformats.org/drawingml/2006/main"/>
-          <a:p xmlns:a="http://schemas.openxmlformats.org/drawingml/2006/main">
-            <a:pPr algn="l">
-              <a:lnSpc>
-                <a:spcPct val="112000"/>
-              </a:lnSpc>
-              <a:buNone/>
-              <a:defRPr sz="1725" b="0">
-                <a:solidFill>
-                  <a:srgbClr val="14213D"/>
-                </a:solidFill>
-                <a:latin typeface="Avenir Next"/>
-                <a:ea typeface="Avenir Next"/>
-                <a:cs typeface="Avenir Next"/>
-              </a:defRPr>
-            </a:pPr>
-            <a:r>
-              <a:rPr sz="1725" b="0">
-                <a:solidFill>
-                  <a:srgbClr val="14213D"/>
-                </a:solidFill>
-                <a:latin typeface="Avenir Next"/>
-                <a:ea typeface="Avenir Next"/>
-                <a:cs typeface="Avenir Next"/>
-              </a:rPr>
-              <a:t>rollback_verified = true means that temporary table is absent.</a:t>
-            </a:r>
-          </a:p>
-        </p:txBody>
-      </p:sp>
-      <p:sp>
-        <p:nvSpPr>
-          <p:cNvPr id="10" name="">
-            <a:extLst xmlns:a="http://schemas.openxmlformats.org/drawingml/2006/main">
-              <a:ext uri="{FF2B5EF4-FFF2-40B4-BE49-F238E27FC236}">
-                <a16:creationId xmlns:a16="http://schemas.microsoft.com/office/drawing/2014/main" id="{497D5E7A-3DB7-451C-8524-65389B3A1428}"/>
-              </a:ext>
-            </a:extLst>
-          </p:cNvPr>
-          <p:cNvSpPr>
-            <a:spLocks xmlns:a="http://schemas.openxmlformats.org/drawingml/2006/main" noGrp="1"/>
-          </p:cNvSpPr>
-          <p:nvPr/>
-        </p:nvSpPr>
-        <p:spPr>
-          <a:xfrm xmlns:a="http://schemas.openxmlformats.org/drawingml/2006/main">
-            <a:off x="7810500" y="4448175"/>
-            <a:ext cx="400050" cy="323850"/>
-          </a:xfrm>
-          <a:prstGeom xmlns:a="http://schemas.openxmlformats.org/drawingml/2006/main" prst="roundRect">
-            <a:avLst>
-              <a:gd name="adj" fmla="val 50000"/>
-            </a:avLst>
-          </a:prstGeom>
-          <a:solidFill xmlns:a="http://schemas.openxmlformats.org/drawingml/2006/main">
-            <a:srgbClr val="14213D"/>
-          </a:solidFill>
-          <a:ln xmlns:a="http://schemas.openxmlformats.org/drawingml/2006/main" w="9525">
-            <a:solidFill>
-              <a:srgbClr val="14213D"/>
-            </a:solidFill>
-            <a:prstDash val="solid"/>
-          </a:ln>
-        </p:spPr>
-        <p:txBody>
-          <a:bodyPr xmlns:a="http://schemas.openxmlformats.org/drawingml/2006/main" lIns="66675" tIns="0" rIns="66675" bIns="0" anchor="ctr">
-            <a:normAutofit fontScale="100000"/>
-          </a:bodyPr>
-          <a:lstStyle xmlns:a="http://schemas.openxmlformats.org/drawingml/2006/main"/>
-          <a:p xmlns:a="http://schemas.openxmlformats.org/drawingml/2006/main">
-            <a:pPr algn="ctr">
-              <a:buNone/>
-              <a:defRPr sz="1050" b="1">
-                <a:solidFill>
-                  <a:srgbClr val="FFFFFF"/>
-                </a:solidFill>
-                <a:latin typeface="Avenir Next"/>
-                <a:ea typeface="Avenir Next"/>
-                <a:cs typeface="Avenir Next"/>
-              </a:defRPr>
-            </a:pPr>
-            <a:r>
-              <a:rPr sz="1050" b="1">
-                <a:solidFill>
-                  <a:srgbClr val="FFFFFF"/>
-                </a:solidFill>
-                <a:latin typeface="Avenir Next"/>
-                <a:ea typeface="Avenir Next"/>
-                <a:cs typeface="Avenir Next"/>
-              </a:rPr>
-              <a:t>3</a:t>
-            </a:r>
-          </a:p>
-        </p:txBody>
-      </p:sp>
-      <p:sp>
-        <p:nvSpPr>
-          <p:cNvPr id="11" name="">
-            <a:extLst xmlns:a="http://schemas.openxmlformats.org/drawingml/2006/main">
-              <a:ext uri="{FF2B5EF4-FFF2-40B4-BE49-F238E27FC236}">
-                <a16:creationId xmlns:a16="http://schemas.microsoft.com/office/drawing/2014/main" id="{4E14103D-8FCA-42B9-A8C3-C66C3147FF19}"/>
-              </a:ext>
-            </a:extLst>
-          </p:cNvPr>
-          <p:cNvSpPr>
-            <a:spLocks xmlns:a="http://schemas.openxmlformats.org/drawingml/2006/main" noGrp="1"/>
-          </p:cNvSpPr>
-          <p:nvPr/>
-        </p:nvSpPr>
-        <p:spPr>
-          <a:xfrm xmlns:a="http://schemas.openxmlformats.org/drawingml/2006/main">
-            <a:off x="8420100" y="4467225"/>
-            <a:ext cx="3048000" cy="742950"/>
-          </a:xfrm>
-          <a:prstGeom xmlns:a="http://schemas.openxmlformats.org/drawingml/2006/main" prst="rect">
-            <a:avLst/>
-          </a:prstGeom>
-          <a:noFill xmlns:a="http://schemas.openxmlformats.org/drawingml/2006/main"/>
-          <a:ln xmlns:a="http://schemas.openxmlformats.org/drawingml/2006/main" w="0">
-            <a:noFill/>
-            <a:prstDash val="solid"/>
-          </a:ln>
-        </p:spPr>
-        <p:txBody>
-          <a:bodyPr xmlns:a="http://schemas.openxmlformats.org/drawingml/2006/main" wrap="square" lIns="0" tIns="0" rIns="0" bIns="0" anchor="t">
-            <a:noAutofit/>
-          </a:bodyPr>
-          <a:lstStyle xmlns:a="http://schemas.openxmlformats.org/drawingml/2006/main"/>
-          <a:p xmlns:a="http://schemas.openxmlformats.org/drawingml/2006/main">
-            <a:pPr algn="l">
-              <a:lnSpc>
-                <a:spcPct val="112000"/>
-              </a:lnSpc>
-              <a:buNone/>
-              <a:defRPr sz="1725" b="0">
-                <a:solidFill>
-                  <a:srgbClr val="14213D"/>
-                </a:solidFill>
-                <a:latin typeface="Avenir Next"/>
-                <a:ea typeface="Avenir Next"/>
-                <a:cs typeface="Avenir Next"/>
-              </a:defRPr>
-            </a:pPr>
-            <a:r>
-              <a:rPr sz="1725" b="0">
-                <a:solidFill>
-                  <a:srgbClr val="14213D"/>
-                </a:solidFill>
-                <a:latin typeface="Avenir Next"/>
-                <a:ea typeface="Avenir Next"/>
-                <a:cs typeface="Avenir Next"/>
-              </a:rPr>
-              <a:t>The ticket migration needs its own column and row checks.</a:t>
-            </a:r>
-          </a:p>
-        </p:txBody>
-      </p:sp>
-    </p:spTree>
-    <p:extLst>
-      <p:ext uri="{BB962C8B-B14F-4D97-AF65-F5344CB8AC3E}">
-        <p14:creationId xmlns:p14="http://schemas.microsoft.com/office/powerpoint/2010/main" val="1396064841"/>
-      </p:ext>
-    </p:extLst>
-  </p:cSld>
-</p:sld>
+<ns0:sld xmlns:ns0="http://schemas.openxmlformats.org/presentationml/2006/main" xmlns:ns1="http://schemas.openxmlformats.org/drawingml/2006/main" xmlns:ns2="http://schemas.microsoft.com/office/drawing/2014/main" xmlns:ns3="http://schemas.openxmlformats.org/officeDocument/2006/relationships" xmlns:ns4="http://schemas.microsoft.com/office/powerpoint/2010/main">
+  <ns0:cSld>
+    <ns0:bg>
+      <ns0:bgPr>
+        <ns1:solidFill>
+          <ns1:srgbClr val="F7F3EA"/>
+        </ns1:solidFill>
+      </ns0:bgPr>
+    </ns0:bg>
+    <ns0:spTree>
+      <ns0:nvGrpSpPr>
+        <ns0:cNvPr id="1" name=""/>
+        <ns0:cNvGrpSpPr/>
+        <ns0:nvPr/>
+      </ns0:nvGrpSpPr>
+      <ns0:grpSpPr>
+        <ns1:xfrm/>
+      </ns0:grpSpPr>
+      <ns0:sp>
+        <ns0:nvSpPr>
+          <ns0:cNvPr id="12" name="">
+            <ns1:extLst>
+              <ns1:ext uri="{FF2B5EF4-FFF2-40B4-BE49-F238E27FC236}">
+                <ns2:creationId id="{B04030B4-4F6D-4F40-B102-EEE7223B3A1F}"/>
+              </ns1:ext>
+            </ns1:extLst>
+          </ns0:cNvPr>
+          <ns0:cNvSpPr>
+            <ns1:spLocks noGrp="1"/>
+          </ns0:cNvSpPr>
+          <ns0:nvPr/>
+        </ns0:nvSpPr>
+        <ns0:spPr>
+          <ns1:xfrm>
+            <ns1:off x="552450" y="400050"/>
+            <ns1:ext cx="1483995" cy="323850"/>
+          </ns1:xfrm>
+          <ns1:prstGeom prst="roundRect">
+            <ns1:avLst>
+              <ns1:gd name="adj" fmla="val 50000"/>
+            </ns1:avLst>
+          </ns1:prstGeom>
+          <ns1:solidFill>
+            <ns1:srgbClr val="14213D"/>
+          </ns1:solidFill>
+          <ns1:ln w="9525">
+            <ns1:solidFill>
+              <ns1:srgbClr val="14213D"/>
+            </ns1:solidFill>
+            <ns1:prstDash val="solid"/>
+          </ns1:ln>
+        </ns0:spPr>
+        <ns0:txBody>
+          <ns1:bodyPr lIns="66675" tIns="0" rIns="66675" bIns="0" anchor="ctr">
+            <ns1:normAutofit fontScale="82275"/>
+          </ns1:bodyPr>
+          <ns1:lstStyle/>
+          <ns1:p>
+            <ns1:pPr algn="ctr">
+              <ns1:buNone/>
+              <ns1:defRPr sz="1050" b="1">
+                <ns1:solidFill>
+                  <ns1:srgbClr val="FFFFFF"/>
+                </ns1:solidFill>
+                <ns1:latin typeface="Avenir Next"/>
+                <ns1:ea typeface="Avenir Next"/>
+                <ns1:cs typeface="Avenir Next"/>
+              </ns1:defRPr>
+            </ns1:pPr>
+            <ns1:r>
+              <ns1:rPr sz="1050" b="1">
+                <ns1:solidFill>
+                  <ns1:srgbClr val="FFFFFF"/>
+                </ns1:solidFill>
+                <ns1:latin typeface="Avenir Next"/>
+                <ns1:ea typeface="Avenir Next"/>
+                <ns1:cs typeface="Avenir Next"/>
+              </ns1:rPr>
+              <ns1:t>SUPABASE SQL EDITOR</ns1:t>
+            </ns1:r>
+          </ns1:p>
+        </ns0:txBody>
+      </ns0:sp>
+      <ns0:sp>
+        <ns0:nvSpPr>
+          <ns0:cNvPr id="2" name="">
+            <ns1:extLst>
+              <ns1:ext uri="{FF2B5EF4-FFF2-40B4-BE49-F238E27FC236}">
+                <ns2:creationId id="{4A8AD773-5FC9-423E-9EF2-2FD0246BD91D}"/>
+              </ns1:ext>
+            </ns1:extLst>
+          </ns0:cNvPr>
+          <ns0:cNvSpPr>
+            <ns1:spLocks noGrp="1"/>
+          </ns0:cNvSpPr>
+          <ns0:nvPr/>
+        </ns0:nvSpPr>
+        <ns0:spPr>
+          <ns1:xfrm>
+            <ns1:off x="552450" y="914400"/>
+            <ns1:ext cx="11049000" cy="704850"/>
+          </ns1:xfrm>
+          <ns1:prstGeom prst="rect">
+            <ns1:avLst/>
+          </ns1:prstGeom>
+          <ns1:noFill/>
+          <ns1:ln w="0">
+            <ns1:noFill/>
+            <ns1:prstDash val="solid"/>
+          </ns1:ln>
+        </ns0:spPr>
+        <ns0:txBody>
+          <ns1:bodyPr wrap="square" lIns="0" tIns="0" rIns="0" bIns="0" anchor="t">
+            <ns1:noAutofit/>
+          </ns1:bodyPr>
+          <ns1:lstStyle/>
+          <ns1:p>
+            <ns1:pPr algn="l">
+              <ns1:lnSpc>
+                <ns1:spcPct val="95000"/>
+              </ns1:lnSpc>
+              <ns1:buNone/>
+              <ns1:defRPr sz="2700" b="1">
+                <ns1:solidFill>
+                  <ns1:srgbClr val="14213D"/>
+                </ns1:solidFill>
+                <ns1:latin typeface="Georgia"/>
+                <ns1:ea typeface="Georgia"/>
+                <ns1:cs typeface="Georgia"/>
+              </ns1:defRPr>
+            </ns1:pPr>
+            <ns1:r>
+              <ns1:rPr sz="2700" b="1">
+                <ns1:solidFill>
+                  <ns1:srgbClr val="14213D"/>
+                </ns1:solidFill>
+                <ns1:latin typeface="Georgia"/>
+                <ns1:ea typeface="Georgia"/>
+                <ns1:cs typeface="Georgia"/>
+              </ns1:rPr>
+              <ns1:t>A temporary-table rollback in Supabase</ns1:t>
+            </ns1:r>
+          </ns1:p>
+        </ns0:txBody>
+      </ns0:sp>
+      <ns0:sp>
+        <ns0:nvSpPr>
+          <ns0:cNvPr id="3" name="">
+            <ns1:extLst>
+              <ns1:ext uri="{FF2B5EF4-FFF2-40B4-BE49-F238E27FC236}">
+                <ns2:creationId id="{9DA3C4D8-DF6B-4DB6-A58E-F8296637B7B7}"/>
+              </ns1:ext>
+            </ns1:extLst>
+          </ns0:cNvPr>
+          <ns0:cNvSpPr>
+            <ns1:spLocks noGrp="1"/>
+          </ns0:cNvSpPr>
+          <ns0:nvPr/>
+        </ns0:nvSpPr>
+        <ns0:spPr>
+          <ns1:xfrm>
+            <ns1:off x="10477500" y="6334125"/>
+            <ns1:ext cx="1143000" cy="228600"/>
+          </ns1:xfrm>
+          <ns1:prstGeom prst="rect">
+            <ns1:avLst/>
+          </ns1:prstGeom>
+          <ns1:noFill/>
+          <ns1:ln w="0">
+            <ns1:noFill/>
+            <ns1:prstDash val="solid"/>
+          </ns1:ln>
+        </ns0:spPr>
+        <ns0:txBody>
+          <ns1:bodyPr lIns="0" tIns="0" rIns="0" bIns="0" anchor="t">
+            <ns1:noAutofit/>
+          </ns1:bodyPr>
+          <ns1:lstStyle/>
+          <ns1:p>
+            <ns1:pPr algn="r">
+              <ns1:buNone/>
+              <ns1:defRPr sz="900" b="1">
+                <ns1:solidFill>
+                  <ns1:srgbClr val="64748B"/>
+                </ns1:solidFill>
+                <ns1:latin typeface="Helvetica Neue"/>
+                <ns1:ea typeface="Helvetica Neue"/>
+                <ns1:cs typeface="Helvetica Neue"/>
+              </ns1:defRPr>
+            </ns1:pPr>
+            <ns1:r>
+              <ns1:rPr sz="900" b="1">
+                <ns1:solidFill>
+                  <ns1:srgbClr val="64748B"/>
+                </ns1:solidFill>
+                <ns1:latin typeface="Helvetica Neue"/>
+                <ns1:ea typeface="Helvetica Neue"/>
+                <ns1:cs typeface="Helvetica Neue"/>
+              </ns1:rPr>
+              <ns1:t>16</ns1:t>
+            </ns1:r>
+          </ns1:p>
+        </ns0:txBody>
+      </ns0:sp>
+      <ns0:sp>
+        <ns0:nvSpPr>
+          <ns0:cNvPr id="4" name="">
+            <ns1:extLst>
+              <ns1:ext uri="{FF2B5EF4-FFF2-40B4-BE49-F238E27FC236}">
+                <ns2:creationId id="{F6968143-DC77-42D4-B8C2-CEE24C0CAEB0}"/>
+              </ns1:ext>
+            </ns1:extLst>
+          </ns0:cNvPr>
+          <ns0:cNvSpPr>
+            <ns1:spLocks noGrp="1"/>
+          </ns0:cNvSpPr>
+          <ns0:nvPr/>
+        </ns0:nvSpPr>
+        <ns0:spPr>
+          <ns1:xfrm>
+            <ns1:off x="552450" y="1952625"/>
+            <ns1:ext cx="6762750" cy="4095750"/>
+          </ns1:xfrm>
+          <ns1:prstGeom prst="roundRect">
+            <ns1:avLst>
+              <ns1:gd name="adj" fmla="val 4186"/>
+            </ns1:avLst>
+          </ns1:prstGeom>
+          <ns1:solidFill>
+            <ns1:srgbClr val="FFFFFF"/>
+          </ns1:solidFill>
+          <ns1:ln w="9525">
+            <ns1:solidFill>
+              <ns1:srgbClr val="E9E4D8"/>
+            </ns1:solidFill>
+            <ns1:prstDash val="solid"/>
+          </ns1:ln>
+        </ns0:spPr>
+      </ns0:sp>
+      <ns0:pic>
+        <ns0:nvPicPr>
+          <ns0:cNvPr id="18" name="" descr="Supabase SQL Editor after a transaction creates a temporary table, inserts a row, and rolls back. A catalog query returns rollback_verified = true, confirming that the temporary relation is absent. This is a temporary-table demonstration, not a view migration. Captured August 25, 2026 with account details redacted."/>
+          <ns0:cNvPicPr>
+            <ns1:picLocks noChangeAspect="1"/>
+          </ns0:cNvPicPr>
+          <ns0:nvPr/>
+        </ns0:nvPicPr>
+        <ns0:blipFill>
+          <ns1:blip ns3:embed="R3840561e764046ad"/>
+          <ns1:srcRect l="0" t="25449" r="0" b="25449"/>
+          <ns1:stretch>
+            <ns1:fillRect l="0" t="0" r="0" b="0"/>
+          </ns1:stretch>
+        </ns0:blipFill>
+        <ns0:spPr>
+          <ns1:xfrm>
+            <ns1:off x="695325" y="2095500"/>
+            <ns1:ext cx="6477000" cy="3810000"/>
+          </ns1:xfrm>
+          <ns1:prstGeom prst="roundRect">
+            <ns1:avLst>
+              <ns1:gd name="adj" fmla="val 3000"/>
+            </ns1:avLst>
+          </ns1:prstGeom>
+        </ns0:spPr>
+      </ns0:pic>
+      <ns0:sp>
+        <ns0:nvSpPr>
+          <ns0:cNvPr id="6" name="">
+            <ns1:extLst>
+              <ns1:ext uri="{FF2B5EF4-FFF2-40B4-BE49-F238E27FC236}">
+                <ns2:creationId id="{FD4C2BEE-EFD4-4D20-BB7B-5EC45413F748}"/>
+              </ns1:ext>
+            </ns1:extLst>
+          </ns0:cNvPr>
+          <ns0:cNvSpPr>
+            <ns1:spLocks noGrp="1"/>
+          </ns0:cNvSpPr>
+          <ns0:nvPr/>
+        </ns0:nvSpPr>
+        <ns0:spPr>
+          <ns1:xfrm>
+            <ns1:off x="7810500" y="2124075"/>
+            <ns1:ext cx="400050" cy="323850"/>
+          </ns1:xfrm>
+          <ns1:prstGeom prst="roundRect">
+            <ns1:avLst>
+              <ns1:gd name="adj" fmla="val 50000"/>
+            </ns1:avLst>
+          </ns1:prstGeom>
+          <ns1:solidFill>
+            <ns1:srgbClr val="F4A261"/>
+          </ns1:solidFill>
+          <ns1:ln w="9525">
+            <ns1:solidFill>
+              <ns1:srgbClr val="F4A261"/>
+            </ns1:solidFill>
+            <ns1:prstDash val="solid"/>
+          </ns1:ln>
+        </ns0:spPr>
+        <ns0:txBody>
+          <ns1:bodyPr lIns="66675" tIns="0" rIns="66675" bIns="0" anchor="ctr">
+            <ns1:normAutofit fontScale="100000"/>
+          </ns1:bodyPr>
+          <ns1:lstStyle/>
+          <ns1:p>
+            <ns1:pPr algn="ctr">
+              <ns1:buNone/>
+              <ns1:defRPr sz="1050" b="1">
+                <ns1:solidFill>
+                  <ns1:srgbClr val="14213D"/>
+                </ns1:solidFill>
+                <ns1:latin typeface="Avenir Next"/>
+                <ns1:ea typeface="Avenir Next"/>
+                <ns1:cs typeface="Avenir Next"/>
+              </ns1:defRPr>
+            </ns1:pPr>
+            <ns1:r>
+              <ns1:rPr sz="1050" b="1">
+                <ns1:solidFill>
+                  <ns1:srgbClr val="14213D"/>
+                </ns1:solidFill>
+                <ns1:latin typeface="Avenir Next"/>
+                <ns1:ea typeface="Avenir Next"/>
+                <ns1:cs typeface="Avenir Next"/>
+              </ns1:rPr>
+              <ns1:t>1</ns1:t>
+            </ns1:r>
+          </ns1:p>
+        </ns0:txBody>
+      </ns0:sp>
+      <ns0:sp>
+        <ns0:nvSpPr>
+          <ns0:cNvPr id="7" name="">
+            <ns1:extLst>
+              <ns1:ext uri="{FF2B5EF4-FFF2-40B4-BE49-F238E27FC236}">
+                <ns2:creationId id="{7AFF07FE-3A57-4863-A085-5B214AB33FB7}"/>
+              </ns1:ext>
+            </ns1:extLst>
+          </ns0:cNvPr>
+          <ns0:cNvSpPr>
+            <ns1:spLocks noGrp="1"/>
+          </ns0:cNvSpPr>
+          <ns0:nvPr/>
+        </ns0:nvSpPr>
+        <ns0:spPr>
+          <ns1:xfrm>
+            <ns1:off x="8420100" y="2143125"/>
+            <ns1:ext cx="3048000" cy="742950"/>
+          </ns1:xfrm>
+          <ns1:prstGeom prst="rect">
+            <ns1:avLst/>
+          </ns1:prstGeom>
+          <ns1:noFill/>
+          <ns1:ln w="0">
+            <ns1:noFill/>
+            <ns1:prstDash val="solid"/>
+          </ns1:ln>
+        </ns0:spPr>
+        <ns0:txBody>
+          <ns1:bodyPr wrap="square" lIns="0" tIns="0" rIns="0" bIns="0" anchor="t">
+            <ns1:noAutofit/>
+          </ns1:bodyPr>
+          <ns1:lstStyle/>
+          <ns1:p>
+            <ns1:pPr algn="l">
+              <ns1:lnSpc>
+                <ns1:spcPct val="112000"/>
+              </ns1:lnSpc>
+              <ns1:buNone/>
+              <ns1:defRPr sz="1725" b="1">
+                <ns1:solidFill>
+                  <ns1:srgbClr val="14213D"/>
+                </ns1:solidFill>
+                <ns1:latin typeface="Avenir Next"/>
+                <ns1:ea typeface="Avenir Next"/>
+                <ns1:cs typeface="Avenir Next"/>
+              </ns1:defRPr>
+            </ns1:pPr>
+            <ns1:r>
+              <ns1:rPr sz="1725" b="1">
+                <ns1:solidFill>
+                  <ns1:srgbClr val="14213D"/>
+                </ns1:solidFill>
+                <ns1:latin typeface="Avenir Next"/>
+                <ns1:ea typeface="Avenir Next"/>
+                <ns1:cs typeface="Avenir Next"/>
+              </ns1:rPr>
+              <ns1:t>The saved screenshot shows a disposable temporary-table check.</ns1:t>
+            </ns1:r>
+          </ns1:p>
+        </ns0:txBody>
+      </ns0:sp>
+      <ns0:sp>
+        <ns0:nvSpPr>
+          <ns0:cNvPr id="8" name="">
+            <ns1:extLst>
+              <ns1:ext uri="{FF2B5EF4-FFF2-40B4-BE49-F238E27FC236}">
+                <ns2:creationId id="{6B8E6058-57B6-4010-8B30-D6AB0B6877E8}"/>
+              </ns1:ext>
+            </ns1:extLst>
+          </ns0:cNvPr>
+          <ns0:cNvSpPr>
+            <ns1:spLocks noGrp="1"/>
+          </ns0:cNvSpPr>
+          <ns0:nvPr/>
+        </ns0:nvSpPr>
+        <ns0:spPr>
+          <ns1:xfrm>
+            <ns1:off x="7810500" y="3286125"/>
+            <ns1:ext cx="400050" cy="323850"/>
+          </ns1:xfrm>
+          <ns1:prstGeom prst="roundRect">
+            <ns1:avLst>
+              <ns1:gd name="adj" fmla="val 50000"/>
+            </ns1:avLst>
+          </ns1:prstGeom>
+          <ns1:solidFill>
+            <ns1:srgbClr val="14213D"/>
+          </ns1:solidFill>
+          <ns1:ln w="9525">
+            <ns1:solidFill>
+              <ns1:srgbClr val="14213D"/>
+            </ns1:solidFill>
+            <ns1:prstDash val="solid"/>
+          </ns1:ln>
+        </ns0:spPr>
+        <ns0:txBody>
+          <ns1:bodyPr lIns="66675" tIns="0" rIns="66675" bIns="0" anchor="ctr">
+            <ns1:normAutofit fontScale="100000"/>
+          </ns1:bodyPr>
+          <ns1:lstStyle/>
+          <ns1:p>
+            <ns1:pPr algn="ctr">
+              <ns1:buNone/>
+              <ns1:defRPr sz="1050" b="1">
+                <ns1:solidFill>
+                  <ns1:srgbClr val="FFFFFF"/>
+                </ns1:solidFill>
+                <ns1:latin typeface="Avenir Next"/>
+                <ns1:ea typeface="Avenir Next"/>
+                <ns1:cs typeface="Avenir Next"/>
+              </ns1:defRPr>
+            </ns1:pPr>
+            <ns1:r>
+              <ns1:rPr sz="1050" b="1">
+                <ns1:solidFill>
+                  <ns1:srgbClr val="FFFFFF"/>
+                </ns1:solidFill>
+                <ns1:latin typeface="Avenir Next"/>
+                <ns1:ea typeface="Avenir Next"/>
+                <ns1:cs typeface="Avenir Next"/>
+              </ns1:rPr>
+              <ns1:t>2</ns1:t>
+            </ns1:r>
+          </ns1:p>
+        </ns0:txBody>
+      </ns0:sp>
+      <ns0:sp>
+        <ns0:nvSpPr>
+          <ns0:cNvPr id="9" name="">
+            <ns1:extLst>
+              <ns1:ext uri="{FF2B5EF4-FFF2-40B4-BE49-F238E27FC236}">
+                <ns2:creationId id="{5917004D-BE3A-4D42-8A9D-F55079CFCB92}"/>
+              </ns1:ext>
+            </ns1:extLst>
+          </ns0:cNvPr>
+          <ns0:cNvSpPr>
+            <ns1:spLocks noGrp="1"/>
+          </ns0:cNvSpPr>
+          <ns0:nvPr/>
+        </ns0:nvSpPr>
+        <ns0:spPr>
+          <ns1:xfrm>
+            <ns1:off x="8420100" y="3305175"/>
+            <ns1:ext cx="3048000" cy="742950"/>
+          </ns1:xfrm>
+          <ns1:prstGeom prst="rect">
+            <ns1:avLst/>
+          </ns1:prstGeom>
+          <ns1:noFill/>
+          <ns1:ln w="0">
+            <ns1:noFill/>
+            <ns1:prstDash val="solid"/>
+          </ns1:ln>
+        </ns0:spPr>
+        <ns0:txBody>
+          <ns1:bodyPr wrap="square" lIns="0" tIns="0" rIns="0" bIns="0" anchor="t">
+            <ns1:noAutofit/>
+          </ns1:bodyPr>
+          <ns1:lstStyle/>
+          <ns1:p>
+            <ns1:pPr algn="l">
+              <ns1:lnSpc>
+                <ns1:spcPct val="112000"/>
+              </ns1:lnSpc>
+              <ns1:buNone/>
+              <ns1:defRPr sz="1725" b="0">
+                <ns1:solidFill>
+                  <ns1:srgbClr val="14213D"/>
+                </ns1:solidFill>
+                <ns1:latin typeface="Avenir Next"/>
+                <ns1:ea typeface="Avenir Next"/>
+                <ns1:cs typeface="Avenir Next"/>
+              </ns1:defRPr>
+            </ns1:pPr>
+            <ns1:r>
+              <ns1:rPr sz="1725" b="0">
+                <ns1:solidFill>
+                  <ns1:srgbClr val="14213D"/>
+                </ns1:solidFill>
+                <ns1:latin typeface="Avenir Next"/>
+                <ns1:ea typeface="Avenir Next"/>
+                <ns1:cs typeface="Avenir Next"/>
+              </ns1:rPr>
+              <ns1:t>rollback_verified = true means that temporary table is absent.</ns1:t>
+            </ns1:r>
+          </ns1:p>
+        </ns0:txBody>
+      </ns0:sp>
+      <ns0:sp>
+        <ns0:nvSpPr>
+          <ns0:cNvPr id="10" name="">
+            <ns1:extLst>
+              <ns1:ext uri="{FF2B5EF4-FFF2-40B4-BE49-F238E27FC236}">
+                <ns2:creationId id="{497D5E7A-3DB7-451C-8524-65389B3A1428}"/>
+              </ns1:ext>
+            </ns1:extLst>
+          </ns0:cNvPr>
+          <ns0:cNvSpPr>
+            <ns1:spLocks noGrp="1"/>
+          </ns0:cNvSpPr>
+          <ns0:nvPr/>
+        </ns0:nvSpPr>
+        <ns0:spPr>
+          <ns1:xfrm>
+            <ns1:off x="7810500" y="4448175"/>
+            <ns1:ext cx="400050" cy="323850"/>
+          </ns1:xfrm>
+          <ns1:prstGeom prst="roundRect">
+            <ns1:avLst>
+              <ns1:gd name="adj" fmla="val 50000"/>
+            </ns1:avLst>
+          </ns1:prstGeom>
+          <ns1:solidFill>
+            <ns1:srgbClr val="14213D"/>
+          </ns1:solidFill>
+          <ns1:ln w="9525">
+            <ns1:solidFill>
+              <ns1:srgbClr val="14213D"/>
+            </ns1:solidFill>
+            <ns1:prstDash val="solid"/>
+          </ns1:ln>
+        </ns0:spPr>
+        <ns0:txBody>
+          <ns1:bodyPr lIns="66675" tIns="0" rIns="66675" bIns="0" anchor="ctr">
+            <ns1:normAutofit fontScale="100000"/>
+          </ns1:bodyPr>
+          <ns1:lstStyle/>
+          <ns1:p>
+            <ns1:pPr algn="ctr">
+              <ns1:buNone/>
+              <ns1:defRPr sz="1050" b="1">
+                <ns1:solidFill>
+                  <ns1:srgbClr val="FFFFFF"/>
+                </ns1:solidFill>
+                <ns1:latin typeface="Avenir Next"/>
+                <ns1:ea typeface="Avenir Next"/>
+                <ns1:cs typeface="Avenir Next"/>
+              </ns1:defRPr>
+            </ns1:pPr>
+            <ns1:r>
+              <ns1:rPr sz="1050" b="1">
+                <ns1:solidFill>
+                  <ns1:srgbClr val="FFFFFF"/>
+                </ns1:solidFill>
+                <ns1:latin typeface="Avenir Next"/>
+                <ns1:ea typeface="Avenir Next"/>
+                <ns1:cs typeface="Avenir Next"/>
+              </ns1:rPr>
+              <ns1:t>3</ns1:t>
+            </ns1:r>
+          </ns1:p>
+        </ns0:txBody>
+      </ns0:sp>
+      <ns0:sp>
+        <ns0:nvSpPr>
+          <ns0:cNvPr id="11" name="">
+            <ns1:extLst>
+              <ns1:ext uri="{FF2B5EF4-FFF2-40B4-BE49-F238E27FC236}">
+                <ns2:creationId id="{4E14103D-8FCA-42B9-A8C3-C66C3147FF19}"/>
+              </ns1:ext>
+            </ns1:extLst>
+          </ns0:cNvPr>
+          <ns0:cNvSpPr>
+            <ns1:spLocks noGrp="1"/>
+          </ns0:cNvSpPr>
+          <ns0:nvPr/>
+        </ns0:nvSpPr>
+        <ns0:spPr>
+          <ns1:xfrm>
+            <ns1:off x="8420100" y="4467225"/>
+            <ns1:ext cx="3048000" cy="742950"/>
+          </ns1:xfrm>
+          <ns1:prstGeom prst="rect">
+            <ns1:avLst/>
+          </ns1:prstGeom>
+          <ns1:noFill/>
+          <ns1:ln w="0">
+            <ns1:noFill/>
+            <ns1:prstDash val="solid"/>
+          </ns1:ln>
+        </ns0:spPr>
+        <ns0:txBody>
+          <ns1:bodyPr wrap="square" lIns="0" tIns="0" rIns="0" bIns="0" anchor="t">
+            <ns1:noAutofit/>
+          </ns1:bodyPr>
+          <ns1:lstStyle/>
+          <ns1:p>
+            <ns1:pPr algn="l">
+              <ns1:lnSpc>
+                <ns1:spcPct val="112000"/>
+              </ns1:lnSpc>
+              <ns1:buNone/>
+              <ns1:defRPr sz="1725" b="0">
+                <ns1:solidFill>
+                  <ns1:srgbClr val="14213D"/>
+                </ns1:solidFill>
+                <ns1:latin typeface="Avenir Next"/>
+                <ns1:ea typeface="Avenir Next"/>
+                <ns1:cs typeface="Avenir Next"/>
+              </ns1:defRPr>
+            </ns1:pPr>
+            <ns1:r>
+              <ns1:rPr sz="1725" b="0">
+                <ns1:solidFill>
+                  <ns1:srgbClr val="14213D"/>
+                </ns1:solidFill>
+                <ns1:latin typeface="Avenir Next"/>
+                <ns1:ea typeface="Avenir Next"/>
+                <ns1:cs typeface="Avenir Next"/>
+              </ns1:rPr>
+              <ns1:t>The ticket migration needs its own column and row checks.</ns1:t>
+            </ns1:r>
+          </ns1:p>
+        </ns0:txBody>
+      </ns0:sp>
+    </ns0:spTree>
+    <ns0:extLst>
+      <ns0:ext uri="{BB962C8B-B14F-4D97-AF65-F5344CB8AC3E}">
+        <ns4:creationId val="1396064841"/>
+      </ns0:ext>
+    </ns0:extLst>
+  </ns0:cSld>
+</ns0:sld>
 </file>
 
 <file path=ppt/slides/slide17.xml><?xml version="1.0" encoding="utf-8"?>
